--- a/ppt/Datascience11-Pandas.pptx
+++ b/ppt/Datascience11-Pandas.pptx
@@ -5,10 +5,10 @@
     <p:sldMasterId id="2147483653" r:id="rId1"/>
   </p:sldMasterIdLst>
   <p:notesMasterIdLst>
-    <p:notesMasterId r:id="rId33"/>
+    <p:notesMasterId r:id="rId31"/>
   </p:notesMasterIdLst>
   <p:handoutMasterIdLst>
-    <p:handoutMasterId r:id="rId34"/>
+    <p:handoutMasterId r:id="rId32"/>
   </p:handoutMasterIdLst>
   <p:sldIdLst>
     <p:sldId id="264" r:id="rId2"/>
@@ -40,8 +40,6 @@
     <p:sldId id="297" r:id="rId28"/>
     <p:sldId id="298" r:id="rId29"/>
     <p:sldId id="306" r:id="rId30"/>
-    <p:sldId id="300" r:id="rId31"/>
-    <p:sldId id="301" r:id="rId32"/>
   </p:sldIdLst>
   <p:sldSz cx="9144000" cy="6858000" type="screen4x3"/>
   <p:notesSz cx="6648450" cy="9782175"/>
@@ -6781,371 +6779,6 @@
     <p:extLst>
       <p:ext uri="{BB962C8B-B14F-4D97-AF65-F5344CB8AC3E}">
         <p14:creationId xmlns:p14="http://schemas.microsoft.com/office/powerpoint/2010/main" val="1027414011"/>
-      </p:ext>
-    </p:extLst>
-  </p:cSld>
-  <p:clrMapOvr>
-    <a:masterClrMapping/>
-  </p:clrMapOvr>
-</p:sld>
-</file>
-
-<file path=ppt/slides/slide30.xml><?xml version="1.0" encoding="utf-8"?>
-<p:sld xmlns:a="http://schemas.openxmlformats.org/drawingml/2006/main" xmlns:r="http://schemas.openxmlformats.org/officeDocument/2006/relationships" xmlns:p="http://schemas.openxmlformats.org/presentationml/2006/main">
-  <p:cSld>
-    <p:spTree>
-      <p:nvGrpSpPr>
-        <p:cNvPr id="1" name=""/>
-        <p:cNvGrpSpPr/>
-        <p:nvPr/>
-      </p:nvGrpSpPr>
-      <p:grpSpPr>
-        <a:xfrm>
-          <a:off x="0" y="0"/>
-          <a:ext cx="0" cy="0"/>
-          <a:chOff x="0" y="0"/>
-          <a:chExt cx="0" cy="0"/>
-        </a:xfrm>
-      </p:grpSpPr>
-      <p:sp>
-        <p:nvSpPr>
-          <p:cNvPr id="2" name="Titre 1">
-            <a:extLst>
-              <a:ext uri="{FF2B5EF4-FFF2-40B4-BE49-F238E27FC236}">
-                <a16:creationId xmlns:a16="http://schemas.microsoft.com/office/drawing/2014/main" id="{ECF2046E-B7D6-B69A-B18F-7970DEE68E6D}"/>
-              </a:ext>
-            </a:extLst>
-          </p:cNvPr>
-          <p:cNvSpPr>
-            <a:spLocks noGrp="1"/>
-          </p:cNvSpPr>
-          <p:nvPr>
-            <p:ph type="title"/>
-          </p:nvPr>
-        </p:nvSpPr>
-        <p:spPr/>
-        <p:txBody>
-          <a:bodyPr/>
-          <a:lstStyle/>
-          <a:p>
-            <a:r>
-              <a:rPr lang="fr-FR" dirty="0"/>
-              <a:t>Séries temporelles</a:t>
-            </a:r>
-          </a:p>
-        </p:txBody>
-      </p:sp>
-      <p:sp>
-        <p:nvSpPr>
-          <p:cNvPr id="3" name="Espace réservé du contenu 2">
-            <a:extLst>
-              <a:ext uri="{FF2B5EF4-FFF2-40B4-BE49-F238E27FC236}">
-                <a16:creationId xmlns:a16="http://schemas.microsoft.com/office/drawing/2014/main" id="{0ED3F165-FE9A-BC33-9D97-03D34652D44F}"/>
-              </a:ext>
-            </a:extLst>
-          </p:cNvPr>
-          <p:cNvSpPr>
-            <a:spLocks noGrp="1"/>
-          </p:cNvSpPr>
-          <p:nvPr>
-            <p:ph idx="1"/>
-          </p:nvPr>
-        </p:nvSpPr>
-        <p:spPr/>
-        <p:txBody>
-          <a:bodyPr/>
-          <a:lstStyle/>
-          <a:p>
-            <a:r>
-              <a:rPr lang="fr-FR" dirty="0"/>
-              <a:t>Dans les séries temporelles, la date, la time, la </a:t>
-            </a:r>
-            <a:r>
-              <a:rPr lang="fr-FR" dirty="0" err="1"/>
-              <a:t>datetime</a:t>
-            </a:r>
-            <a:r>
-              <a:rPr lang="fr-FR" dirty="0"/>
-              <a:t> ou l'index de temps est souvent l'index du </a:t>
-            </a:r>
-            <a:r>
-              <a:rPr lang="fr-FR" dirty="0" err="1"/>
-              <a:t>dataframe</a:t>
-            </a:r>
-            <a:endParaRPr lang="fr-FR" dirty="0"/>
-          </a:p>
-          <a:p>
-            <a:pPr lvl="1"/>
-            <a:r>
-              <a:rPr lang="fr-FR" dirty="0" err="1"/>
-              <a:t>index_col</a:t>
-            </a:r>
-            <a:endParaRPr lang="fr-FR" dirty="0"/>
-          </a:p>
-          <a:p>
-            <a:r>
-              <a:rPr lang="fr-FR" dirty="0"/>
-              <a:t>La </a:t>
-            </a:r>
-            <a:r>
-              <a:rPr lang="fr-FR" dirty="0" err="1"/>
-              <a:t>datetime</a:t>
-            </a:r>
-            <a:r>
-              <a:rPr lang="fr-FR" dirty="0"/>
-              <a:t> devrait être au format ISO</a:t>
-            </a:r>
-          </a:p>
-          <a:p>
-            <a:pPr lvl="1"/>
-            <a:r>
-              <a:rPr lang="fr-FR" dirty="0"/>
-              <a:t>Sinon utiliser </a:t>
-            </a:r>
-            <a:r>
-              <a:rPr lang="fr-FR" dirty="0" err="1"/>
-              <a:t>date_format</a:t>
-            </a:r>
-            <a:r>
-              <a:rPr lang="fr-FR" dirty="0"/>
-              <a:t> : "%d/%m/%Y"</a:t>
-            </a:r>
-          </a:p>
-        </p:txBody>
-      </p:sp>
-      <p:pic>
-        <p:nvPicPr>
-          <p:cNvPr id="5" name="Image 4">
-            <a:extLst>
-              <a:ext uri="{FF2B5EF4-FFF2-40B4-BE49-F238E27FC236}">
-                <a16:creationId xmlns:a16="http://schemas.microsoft.com/office/drawing/2014/main" id="{6139980F-B4B3-2ADA-33DE-554910D0CE0E}"/>
-              </a:ext>
-            </a:extLst>
-          </p:cNvPr>
-          <p:cNvPicPr>
-            <a:picLocks noChangeAspect="1"/>
-          </p:cNvPicPr>
-          <p:nvPr/>
-        </p:nvPicPr>
-        <p:blipFill>
-          <a:blip r:embed="rId2"/>
-          <a:stretch>
-            <a:fillRect/>
-          </a:stretch>
-        </p:blipFill>
-        <p:spPr>
-          <a:xfrm>
-            <a:off x="2051720" y="4581128"/>
-            <a:ext cx="5601482" cy="3953427"/>
-          </a:xfrm>
-          <a:prstGeom prst="rect">
-            <a:avLst/>
-          </a:prstGeom>
-        </p:spPr>
-      </p:pic>
-    </p:spTree>
-    <p:extLst>
-      <p:ext uri="{BB962C8B-B14F-4D97-AF65-F5344CB8AC3E}">
-        <p14:creationId xmlns:p14="http://schemas.microsoft.com/office/powerpoint/2010/main" val="1049257540"/>
-      </p:ext>
-    </p:extLst>
-  </p:cSld>
-  <p:clrMapOvr>
-    <a:masterClrMapping/>
-  </p:clrMapOvr>
-</p:sld>
-</file>
-
-<file path=ppt/slides/slide31.xml><?xml version="1.0" encoding="utf-8"?>
-<p:sld xmlns:a="http://schemas.openxmlformats.org/drawingml/2006/main" xmlns:r="http://schemas.openxmlformats.org/officeDocument/2006/relationships" xmlns:p="http://schemas.openxmlformats.org/presentationml/2006/main">
-  <p:cSld>
-    <p:spTree>
-      <p:nvGrpSpPr>
-        <p:cNvPr id="1" name=""/>
-        <p:cNvGrpSpPr/>
-        <p:nvPr/>
-      </p:nvGrpSpPr>
-      <p:grpSpPr>
-        <a:xfrm>
-          <a:off x="0" y="0"/>
-          <a:ext cx="0" cy="0"/>
-          <a:chOff x="0" y="0"/>
-          <a:chExt cx="0" cy="0"/>
-        </a:xfrm>
-      </p:grpSpPr>
-      <p:sp>
-        <p:nvSpPr>
-          <p:cNvPr id="2" name="Titre 1">
-            <a:extLst>
-              <a:ext uri="{FF2B5EF4-FFF2-40B4-BE49-F238E27FC236}">
-                <a16:creationId xmlns:a16="http://schemas.microsoft.com/office/drawing/2014/main" id="{5EE32230-5FBC-901C-8B5D-898D20B05C33}"/>
-              </a:ext>
-            </a:extLst>
-          </p:cNvPr>
-          <p:cNvSpPr>
-            <a:spLocks noGrp="1"/>
-          </p:cNvSpPr>
-          <p:nvPr>
-            <p:ph type="title"/>
-          </p:nvPr>
-        </p:nvSpPr>
-        <p:spPr/>
-        <p:txBody>
-          <a:bodyPr/>
-          <a:lstStyle/>
-          <a:p>
-            <a:r>
-              <a:rPr lang="fr-FR" dirty="0"/>
-              <a:t>Séries temporelles</a:t>
-            </a:r>
-          </a:p>
-        </p:txBody>
-      </p:sp>
-      <p:sp>
-        <p:nvSpPr>
-          <p:cNvPr id="3" name="Espace réservé du contenu 2">
-            <a:extLst>
-              <a:ext uri="{FF2B5EF4-FFF2-40B4-BE49-F238E27FC236}">
-                <a16:creationId xmlns:a16="http://schemas.microsoft.com/office/drawing/2014/main" id="{B24A3162-261C-1A84-0398-B335E34139CC}"/>
-              </a:ext>
-            </a:extLst>
-          </p:cNvPr>
-          <p:cNvSpPr>
-            <a:spLocks noGrp="1"/>
-          </p:cNvSpPr>
-          <p:nvPr>
-            <p:ph idx="1"/>
-          </p:nvPr>
-        </p:nvSpPr>
-        <p:spPr>
-          <a:xfrm>
-            <a:off x="179513" y="1412776"/>
-            <a:ext cx="3744416" cy="5040560"/>
-          </a:xfrm>
-        </p:spPr>
-        <p:txBody>
-          <a:bodyPr/>
-          <a:lstStyle/>
-          <a:p>
-            <a:r>
-              <a:rPr lang="fr-FR" sz="2400" dirty="0"/>
-              <a:t>Il est alors possible de sélectionner par date</a:t>
-            </a:r>
-          </a:p>
-          <a:p>
-            <a:r>
-              <a:rPr lang="fr-FR" sz="2400" dirty="0"/>
-              <a:t>Il est également possible de regrouper par date</a:t>
-            </a:r>
-          </a:p>
-          <a:p>
-            <a:endParaRPr lang="fr-FR" sz="2400" dirty="0"/>
-          </a:p>
-          <a:p>
-            <a:endParaRPr lang="fr-FR" sz="2400" dirty="0"/>
-          </a:p>
-          <a:p>
-            <a:r>
-              <a:rPr lang="fr-FR" sz="2400" dirty="0"/>
-              <a:t>Et d'effectuer des moyennes glissantes</a:t>
-            </a:r>
-          </a:p>
-        </p:txBody>
-      </p:sp>
-      <p:pic>
-        <p:nvPicPr>
-          <p:cNvPr id="5" name="Image 4">
-            <a:extLst>
-              <a:ext uri="{FF2B5EF4-FFF2-40B4-BE49-F238E27FC236}">
-                <a16:creationId xmlns:a16="http://schemas.microsoft.com/office/drawing/2014/main" id="{7EC4B0D0-6361-49EC-2736-1973739041C3}"/>
-              </a:ext>
-            </a:extLst>
-          </p:cNvPr>
-          <p:cNvPicPr>
-            <a:picLocks noChangeAspect="1"/>
-          </p:cNvPicPr>
-          <p:nvPr/>
-        </p:nvPicPr>
-        <p:blipFill>
-          <a:blip r:embed="rId2"/>
-          <a:stretch>
-            <a:fillRect/>
-          </a:stretch>
-        </p:blipFill>
-        <p:spPr>
-          <a:xfrm>
-            <a:off x="3923928" y="1277989"/>
-            <a:ext cx="5231261" cy="5580012"/>
-          </a:xfrm>
-          <a:prstGeom prst="rect">
-            <a:avLst/>
-          </a:prstGeom>
-        </p:spPr>
-      </p:pic>
-      <p:pic>
-        <p:nvPicPr>
-          <p:cNvPr id="7" name="Image 6">
-            <a:extLst>
-              <a:ext uri="{FF2B5EF4-FFF2-40B4-BE49-F238E27FC236}">
-                <a16:creationId xmlns:a16="http://schemas.microsoft.com/office/drawing/2014/main" id="{D837D74B-095C-A8FE-523B-78634525FDB6}"/>
-              </a:ext>
-            </a:extLst>
-          </p:cNvPr>
-          <p:cNvPicPr>
-            <a:picLocks noChangeAspect="1"/>
-          </p:cNvPicPr>
-          <p:nvPr/>
-        </p:nvPicPr>
-        <p:blipFill>
-          <a:blip r:embed="rId3"/>
-          <a:stretch>
-            <a:fillRect/>
-          </a:stretch>
-        </p:blipFill>
-        <p:spPr>
-          <a:xfrm>
-            <a:off x="179513" y="3656792"/>
-            <a:ext cx="3923927" cy="552527"/>
-          </a:xfrm>
-          <a:prstGeom prst="rect">
-            <a:avLst/>
-          </a:prstGeom>
-        </p:spPr>
-      </p:pic>
-      <p:pic>
-        <p:nvPicPr>
-          <p:cNvPr id="9" name="Image 8">
-            <a:extLst>
-              <a:ext uri="{FF2B5EF4-FFF2-40B4-BE49-F238E27FC236}">
-                <a16:creationId xmlns:a16="http://schemas.microsoft.com/office/drawing/2014/main" id="{7339C363-C4F6-6C7A-02CC-FE491961BBBD}"/>
-              </a:ext>
-            </a:extLst>
-          </p:cNvPr>
-          <p:cNvPicPr>
-            <a:picLocks noChangeAspect="1"/>
-          </p:cNvPicPr>
-          <p:nvPr/>
-        </p:nvPicPr>
-        <p:blipFill>
-          <a:blip r:embed="rId4"/>
-          <a:stretch>
-            <a:fillRect/>
-          </a:stretch>
-        </p:blipFill>
-        <p:spPr>
-          <a:xfrm>
-            <a:off x="539552" y="5371712"/>
-            <a:ext cx="2800741" cy="323895"/>
-          </a:xfrm>
-          <a:prstGeom prst="rect">
-            <a:avLst/>
-          </a:prstGeom>
-        </p:spPr>
-      </p:pic>
-    </p:spTree>
-    <p:extLst>
-      <p:ext uri="{BB962C8B-B14F-4D97-AF65-F5344CB8AC3E}">
-        <p14:creationId xmlns:p14="http://schemas.microsoft.com/office/powerpoint/2010/main" val="1353309942"/>
       </p:ext>
     </p:extLst>
   </p:cSld>
